--- a/Lectures/Week3.pptx
+++ b/Lectures/Week3.pptx
@@ -5,10 +5,10 @@
     <p:sldMasterId id="2147483684" r:id="rId4"/>
   </p:sldMasterIdLst>
   <p:notesMasterIdLst>
-    <p:notesMasterId r:id="rId16"/>
+    <p:notesMasterId r:id="rId17"/>
   </p:notesMasterIdLst>
   <p:handoutMasterIdLst>
-    <p:handoutMasterId r:id="rId17"/>
+    <p:handoutMasterId r:id="rId18"/>
   </p:handoutMasterIdLst>
   <p:sldIdLst>
     <p:sldId id="330" r:id="rId5"/>
@@ -16,17 +16,18 @@
     <p:sldId id="364" r:id="rId7"/>
     <p:sldId id="353" r:id="rId8"/>
     <p:sldId id="363" r:id="rId9"/>
-    <p:sldId id="354" r:id="rId10"/>
-    <p:sldId id="355" r:id="rId11"/>
-    <p:sldId id="365" r:id="rId12"/>
+    <p:sldId id="366" r:id="rId10"/>
+    <p:sldId id="354" r:id="rId11"/>
+    <p:sldId id="367" r:id="rId12"/>
     <p:sldId id="362" r:id="rId13"/>
-    <p:sldId id="346" r:id="rId14"/>
-    <p:sldId id="352" r:id="rId15"/>
+    <p:sldId id="368" r:id="rId14"/>
+    <p:sldId id="346" r:id="rId15"/>
+    <p:sldId id="352" r:id="rId16"/>
   </p:sldIdLst>
   <p:sldSz cx="12192000" cy="6858000"/>
   <p:notesSz cx="7315200" cy="9601200"/>
   <p:custDataLst>
-    <p:tags r:id="rId18"/>
+    <p:tags r:id="rId19"/>
   </p:custDataLst>
   <p:defaultTextStyle>
     <a:defPPr>
@@ -137,10 +138,11 @@
             <p14:sldId id="364"/>
             <p14:sldId id="353"/>
             <p14:sldId id="363"/>
+            <p14:sldId id="366"/>
             <p14:sldId id="354"/>
-            <p14:sldId id="355"/>
-            <p14:sldId id="365"/>
+            <p14:sldId id="367"/>
             <p14:sldId id="362"/>
+            <p14:sldId id="368"/>
             <p14:sldId id="346"/>
             <p14:sldId id="352"/>
           </p14:sldIdLst>
@@ -277,7 +279,7 @@
           <a:p>
             <a:fld id="{D5877BEA-FA5E-1B42-A13D-40AB379A1490}" type="datetimeFigureOut">
               <a:rPr lang="de-DE" smtClean="0"/>
-              <a:t>29.11.2025</a:t>
+              <a:t>06.12.2025</a:t>
             </a:fld>
             <a:endParaRPr lang="de-DE"/>
           </a:p>
@@ -443,7 +445,7 @@
           <a:p>
             <a:fld id="{60D87F2F-7E9B-5340-9267-0CCBE9616764}" type="datetimeFigureOut">
               <a:rPr lang="de-DE" smtClean="0"/>
-              <a:t>29.11.2025</a:t>
+              <a:t>06.12.2025</a:t>
             </a:fld>
             <a:endParaRPr lang="de-DE"/>
           </a:p>
@@ -8074,7 +8076,7 @@
                 <a:tabLst/>
                 <a:defRPr/>
               </a:pPr>
-              <a:t>29.11.2025</a:t>
+              <a:t>06.12.2025</a:t>
             </a:fld>
             <a:r>
               <a:rPr lang="de-DE" sz="700" b="0" i="0" dirty="0">
@@ -8627,6 +8629,92 @@
           <p:cNvPr id="2" name="Title 1">
             <a:extLst>
               <a:ext uri="{FF2B5EF4-FFF2-40B4-BE49-F238E27FC236}">
+                <a16:creationId xmlns:a16="http://schemas.microsoft.com/office/drawing/2014/main" id="{CFDD865F-F305-A70D-2CF1-6C8F21A5BAB3}"/>
+              </a:ext>
+            </a:extLst>
+          </p:cNvPr>
+          <p:cNvSpPr>
+            <a:spLocks noGrp="1"/>
+          </p:cNvSpPr>
+          <p:nvPr>
+            <p:ph type="title"/>
+          </p:nvPr>
+        </p:nvSpPr>
+        <p:spPr/>
+        <p:txBody>
+          <a:bodyPr/>
+          <a:lstStyle/>
+          <a:p>
+            <a:r>
+              <a:rPr lang="en-US" dirty="0"/>
+              <a:t>Innovation</a:t>
+            </a:r>
+          </a:p>
+        </p:txBody>
+      </p:sp>
+      <p:sp>
+        <p:nvSpPr>
+          <p:cNvPr id="3" name="Text Placeholder 2">
+            <a:extLst>
+              <a:ext uri="{FF2B5EF4-FFF2-40B4-BE49-F238E27FC236}">
+                <a16:creationId xmlns:a16="http://schemas.microsoft.com/office/drawing/2014/main" id="{8ECA75FF-CB38-5B5E-F78B-D1D004DEA611}"/>
+              </a:ext>
+            </a:extLst>
+          </p:cNvPr>
+          <p:cNvSpPr>
+            <a:spLocks noGrp="1"/>
+          </p:cNvSpPr>
+          <p:nvPr>
+            <p:ph type="body" sz="quarter" idx="12"/>
+          </p:nvPr>
+        </p:nvSpPr>
+        <p:spPr/>
+        <p:txBody>
+          <a:bodyPr/>
+          <a:lstStyle/>
+          <a:p>
+            <a:r>
+              <a:rPr lang="en-US" dirty="0"/>
+              <a:t>Male Karate Mobile Stand</a:t>
+            </a:r>
+          </a:p>
+        </p:txBody>
+      </p:sp>
+    </p:spTree>
+    <p:extLst>
+      <p:ext uri="{BB962C8B-B14F-4D97-AF65-F5344CB8AC3E}">
+        <p14:creationId xmlns:p14="http://schemas.microsoft.com/office/powerpoint/2010/main" val="331175608"/>
+      </p:ext>
+    </p:extLst>
+  </p:cSld>
+  <p:clrMapOvr>
+    <a:masterClrMapping/>
+  </p:clrMapOvr>
+</p:sld>
+</file>
+
+<file path=ppt/slides/slide11.xml><?xml version="1.0" encoding="utf-8"?>
+<p:sld xmlns:a="http://schemas.openxmlformats.org/drawingml/2006/main" xmlns:r="http://schemas.openxmlformats.org/officeDocument/2006/relationships" xmlns:p="http://schemas.openxmlformats.org/presentationml/2006/main">
+  <p:cSld>
+    <p:spTree>
+      <p:nvGrpSpPr>
+        <p:cNvPr id="1" name=""/>
+        <p:cNvGrpSpPr/>
+        <p:nvPr/>
+      </p:nvGrpSpPr>
+      <p:grpSpPr>
+        <a:xfrm>
+          <a:off x="0" y="0"/>
+          <a:ext cx="0" cy="0"/>
+          <a:chOff x="0" y="0"/>
+          <a:chExt cx="0" cy="0"/>
+        </a:xfrm>
+      </p:grpSpPr>
+      <p:sp>
+        <p:nvSpPr>
+          <p:cNvPr id="2" name="Title 1">
+            <a:extLst>
+              <a:ext uri="{FF2B5EF4-FFF2-40B4-BE49-F238E27FC236}">
                 <a16:creationId xmlns:a16="http://schemas.microsoft.com/office/drawing/2014/main" id="{D7187AFF-EFB0-1260-A966-81CFDC163E54}"/>
               </a:ext>
             </a:extLst>
@@ -8720,7 +8808,30 @@
               <a:rPr lang="en-US" sz="1600" dirty="0">
                 <a:hlinkClick r:id="rId4"/>
               </a:rPr>
-              <a:t> - Wikipedia</a:t>
+              <a:t> – Wikipedia</a:t>
+            </a:r>
+            <a:endParaRPr lang="en-US" sz="1600" dirty="0"/>
+          </a:p>
+          <a:p>
+            <a:pPr marL="444500" lvl="1" indent="-266700" defTabSz="914400" eaLnBrk="0" fontAlgn="base" hangingPunct="0">
+              <a:lnSpc>
+                <a:spcPct val="120000"/>
+              </a:lnSpc>
+              <a:spcBef>
+                <a:spcPts val="300"/>
+              </a:spcBef>
+              <a:spcAft>
+                <a:spcPts val="600"/>
+              </a:spcAft>
+              <a:buFont typeface="Calibri" pitchFamily="34" charset="0"/>
+              <a:buChar char="•"/>
+              <a:defRPr/>
+            </a:pPr>
+            <a:r>
+              <a:rPr lang="en-US" sz="1600" dirty="0">
+                <a:hlinkClick r:id="rId5"/>
+              </a:rPr>
+              <a:t>51vkvCLy+nL._AC_SX522_.jpg (522×781)</a:t>
             </a:r>
             <a:endParaRPr lang="en-US" sz="1600" dirty="0">
               <a:solidFill>
@@ -8743,7 +8854,7 @@
 </p:sld>
 </file>
 
-<file path=ppt/slides/slide11.xml><?xml version="1.0" encoding="utf-8"?>
+<file path=ppt/slides/slide12.xml><?xml version="1.0" encoding="utf-8"?>
 <p:sld xmlns:a="http://schemas.openxmlformats.org/drawingml/2006/main" xmlns:r="http://schemas.openxmlformats.org/officeDocument/2006/relationships" xmlns:p="http://schemas.openxmlformats.org/presentationml/2006/main">
   <p:cSld>
     <p:spTree>
@@ -8907,7 +9018,13 @@
           <a:p>
             <a:r>
               <a:rPr lang="en-US" sz="1600" dirty="0"/>
-              <a:t>Shape Generators</a:t>
+              <a:t>Extrude</a:t>
+            </a:r>
+          </a:p>
+          <a:p>
+            <a:r>
+              <a:rPr lang="en-US" sz="1600" dirty="0"/>
+              <a:t>Revolve</a:t>
             </a:r>
           </a:p>
           <a:p>
@@ -8919,29 +9036,32 @@
           <a:p>
             <a:r>
               <a:rPr lang="en-US" sz="1600" dirty="0"/>
+              <a:t>2D drawing to Assembly</a:t>
+            </a:r>
+          </a:p>
+          <a:p>
+            <a:r>
+              <a:rPr lang="en-US" sz="1600" dirty="0"/>
               <a:t>Complex Geometry</a:t>
             </a:r>
           </a:p>
           <a:p>
             <a:r>
               <a:rPr lang="en-US" sz="1600" dirty="0"/>
-              <a:t>Functional Design concepts</a:t>
+              <a:t>Project: A coffee Mug</a:t>
             </a:r>
           </a:p>
           <a:p>
             <a:r>
               <a:rPr lang="en-US" sz="1600" dirty="0"/>
-              <a:t>Project: Toy car</a:t>
+              <a:t>Project: Mobile phone Stand</a:t>
             </a:r>
           </a:p>
           <a:p>
             <a:r>
               <a:rPr lang="en-US" sz="1600" dirty="0"/>
-              <a:t>Assignment (Optional)</a:t>
-            </a:r>
-          </a:p>
-          <a:p>
-            <a:endParaRPr lang="en-US" sz="1600" dirty="0"/>
+              <a:t>Innovation</a:t>
+            </a:r>
           </a:p>
         </p:txBody>
       </p:sp>
@@ -9245,6 +9365,53 @@
           </a:p>
         </p:txBody>
       </p:sp>
+      <p:pic>
+        <p:nvPicPr>
+          <p:cNvPr id="1026" name="Picture 2">
+            <a:extLst>
+              <a:ext uri="{FF2B5EF4-FFF2-40B4-BE49-F238E27FC236}">
+                <a16:creationId xmlns:a16="http://schemas.microsoft.com/office/drawing/2014/main" id="{30FF02AD-3AC0-3E56-74B6-C42CBD943C2E}"/>
+              </a:ext>
+            </a:extLst>
+          </p:cNvPr>
+          <p:cNvPicPr>
+            <a:picLocks noChangeAspect="1" noChangeArrowheads="1"/>
+          </p:cNvPicPr>
+          <p:nvPr/>
+        </p:nvPicPr>
+        <p:blipFill>
+          <a:blip r:embed="rId2">
+            <a:extLst>
+              <a:ext uri="{28A0092B-C50C-407E-A947-70E740481C1C}">
+                <a14:useLocalDpi xmlns:a14="http://schemas.microsoft.com/office/drawing/2010/main" val="0"/>
+              </a:ext>
+            </a:extLst>
+          </a:blip>
+          <a:srcRect/>
+          <a:stretch>
+            <a:fillRect/>
+          </a:stretch>
+        </p:blipFill>
+        <p:spPr bwMode="auto">
+          <a:xfrm>
+            <a:off x="9231988" y="2217254"/>
+            <a:ext cx="2510749" cy="3756991"/>
+          </a:xfrm>
+          <a:prstGeom prst="rect">
+            <a:avLst/>
+          </a:prstGeom>
+          <a:noFill/>
+          <a:extLst>
+            <a:ext uri="{909E8E84-426E-40DD-AFC4-6F175D3DCCD1}">
+              <a14:hiddenFill xmlns:a14="http://schemas.microsoft.com/office/drawing/2010/main">
+                <a:solidFill>
+                  <a:srgbClr val="FFFFFF"/>
+                </a:solidFill>
+              </a14:hiddenFill>
+            </a:ext>
+          </a:extLst>
+        </p:spPr>
+      </p:pic>
     </p:spTree>
     <p:extLst>
       <p:ext uri="{BB962C8B-B14F-4D97-AF65-F5344CB8AC3E}">
@@ -9280,7 +9447,7 @@
           <p:cNvPr id="2" name="Title 1">
             <a:extLst>
               <a:ext uri="{FF2B5EF4-FFF2-40B4-BE49-F238E27FC236}">
-                <a16:creationId xmlns:a16="http://schemas.microsoft.com/office/drawing/2014/main" id="{1A80FA07-DF11-C0FF-A599-003D262E20DD}"/>
+                <a16:creationId xmlns:a16="http://schemas.microsoft.com/office/drawing/2014/main" id="{90E48E9F-2C2C-8AC4-EEFB-9ABFC8B6B00D}"/>
               </a:ext>
             </a:extLst>
           </p:cNvPr>
@@ -9298,7 +9465,7 @@
           <a:p>
             <a:r>
               <a:rPr lang="en-US" dirty="0"/>
-              <a:t>Complex Geometry</a:t>
+              <a:t>2D Drawing to Assembly</a:t>
             </a:r>
           </a:p>
         </p:txBody>
@@ -9308,7 +9475,7 @@
           <p:cNvPr id="3" name="Text Placeholder 2">
             <a:extLst>
               <a:ext uri="{FF2B5EF4-FFF2-40B4-BE49-F238E27FC236}">
-                <a16:creationId xmlns:a16="http://schemas.microsoft.com/office/drawing/2014/main" id="{A368B02A-B6F3-BDE6-01C7-79FA09F4DEC1}"/>
+                <a16:creationId xmlns:a16="http://schemas.microsoft.com/office/drawing/2014/main" id="{BE630ED9-CB62-8850-2155-53A327C20335}"/>
               </a:ext>
             </a:extLst>
           </p:cNvPr>
@@ -9326,21 +9493,51 @@
           <a:p>
             <a:r>
               <a:rPr lang="en-US" dirty="0"/>
-              <a:t>Stacking + merging shapes</a:t>
+              <a:t>Mobile virtual model</a:t>
             </a:r>
           </a:p>
           <a:p>
             <a:r>
               <a:rPr lang="en-US" dirty="0"/>
-              <a:t>Organic forms</a:t>
-            </a:r>
-          </a:p>
-        </p:txBody>
-      </p:sp>
+              <a:t>Why we need it?</a:t>
+            </a:r>
+          </a:p>
+        </p:txBody>
+      </p:sp>
+      <p:pic>
+        <p:nvPicPr>
+          <p:cNvPr id="5" name="Picture 4">
+            <a:extLst>
+              <a:ext uri="{FF2B5EF4-FFF2-40B4-BE49-F238E27FC236}">
+                <a16:creationId xmlns:a16="http://schemas.microsoft.com/office/drawing/2014/main" id="{D2E1AA29-1245-AE0E-2840-815043E3E9A7}"/>
+              </a:ext>
+            </a:extLst>
+          </p:cNvPr>
+          <p:cNvPicPr>
+            <a:picLocks noChangeAspect="1"/>
+          </p:cNvPicPr>
+          <p:nvPr/>
+        </p:nvPicPr>
+        <p:blipFill>
+          <a:blip r:embed="rId2"/>
+          <a:stretch>
+            <a:fillRect/>
+          </a:stretch>
+        </p:blipFill>
+        <p:spPr>
+          <a:xfrm>
+            <a:off x="7644914" y="3008244"/>
+            <a:ext cx="3692344" cy="2783286"/>
+          </a:xfrm>
+          <a:prstGeom prst="rect">
+            <a:avLst/>
+          </a:prstGeom>
+        </p:spPr>
+      </p:pic>
     </p:spTree>
     <p:extLst>
       <p:ext uri="{BB962C8B-B14F-4D97-AF65-F5344CB8AC3E}">
-        <p14:creationId xmlns:p14="http://schemas.microsoft.com/office/powerpoint/2010/main" val="3564082956"/>
+        <p14:creationId xmlns:p14="http://schemas.microsoft.com/office/powerpoint/2010/main" val="2548790649"/>
       </p:ext>
     </p:extLst>
   </p:cSld>
@@ -9372,7 +9569,7 @@
           <p:cNvPr id="2" name="Title 1">
             <a:extLst>
               <a:ext uri="{FF2B5EF4-FFF2-40B4-BE49-F238E27FC236}">
-                <a16:creationId xmlns:a16="http://schemas.microsoft.com/office/drawing/2014/main" id="{17341C73-3337-DB0A-0BF4-6B98FA215C7C}"/>
+                <a16:creationId xmlns:a16="http://schemas.microsoft.com/office/drawing/2014/main" id="{1A80FA07-DF11-C0FF-A599-003D262E20DD}"/>
               </a:ext>
             </a:extLst>
           </p:cNvPr>
@@ -9390,7 +9587,7 @@
           <a:p>
             <a:r>
               <a:rPr lang="en-US" dirty="0"/>
-              <a:t>Functional Design Concepts</a:t>
+              <a:t>Complex Geometry</a:t>
             </a:r>
           </a:p>
         </p:txBody>
@@ -9400,7 +9597,7 @@
           <p:cNvPr id="3" name="Text Placeholder 2">
             <a:extLst>
               <a:ext uri="{FF2B5EF4-FFF2-40B4-BE49-F238E27FC236}">
-                <a16:creationId xmlns:a16="http://schemas.microsoft.com/office/drawing/2014/main" id="{D874CF47-D442-AE61-7734-2F4588EB7FFF}"/>
+                <a16:creationId xmlns:a16="http://schemas.microsoft.com/office/drawing/2014/main" id="{A368B02A-B6F3-BDE6-01C7-79FA09F4DEC1}"/>
               </a:ext>
             </a:extLst>
           </p:cNvPr>
@@ -9418,19 +9615,13 @@
           <a:p>
             <a:r>
               <a:rPr lang="en-US" dirty="0"/>
-              <a:t>Moving parts</a:t>
+              <a:t>Stacking + merging shapes</a:t>
             </a:r>
           </a:p>
           <a:p>
             <a:r>
               <a:rPr lang="en-US" dirty="0"/>
-              <a:t>Snap fits</a:t>
-            </a:r>
-          </a:p>
-          <a:p>
-            <a:r>
-              <a:rPr lang="en-US" dirty="0"/>
-              <a:t>Clearances</a:t>
+              <a:t>Organic forms</a:t>
             </a:r>
           </a:p>
         </p:txBody>
@@ -9438,7 +9629,7 @@
     </p:spTree>
     <p:extLst>
       <p:ext uri="{BB962C8B-B14F-4D97-AF65-F5344CB8AC3E}">
-        <p14:creationId xmlns:p14="http://schemas.microsoft.com/office/powerpoint/2010/main" val="57079908"/>
+        <p14:creationId xmlns:p14="http://schemas.microsoft.com/office/powerpoint/2010/main" val="3564082956"/>
       </p:ext>
     </p:extLst>
   </p:cSld>
@@ -9453,13 +9644,7 @@
   <p:cSld>
     <p:spTree>
       <p:nvGrpSpPr>
-        <p:cNvPr id="1" name="">
-          <a:extLst>
-            <a:ext uri="{FF2B5EF4-FFF2-40B4-BE49-F238E27FC236}">
-              <a16:creationId xmlns:a16="http://schemas.microsoft.com/office/drawing/2014/main" id="{0012F583-EA53-AFD5-CAF4-1175E6AF396F}"/>
-            </a:ext>
-          </a:extLst>
-        </p:cNvPr>
+        <p:cNvPr id="1" name=""/>
         <p:cNvGrpSpPr/>
         <p:nvPr/>
       </p:nvGrpSpPr>
@@ -9476,7 +9661,7 @@
           <p:cNvPr id="2" name="Title 1">
             <a:extLst>
               <a:ext uri="{FF2B5EF4-FFF2-40B4-BE49-F238E27FC236}">
-                <a16:creationId xmlns:a16="http://schemas.microsoft.com/office/drawing/2014/main" id="{9FA3CB66-6C0F-1EB3-A4EC-9B7DF79CE149}"/>
+                <a16:creationId xmlns:a16="http://schemas.microsoft.com/office/drawing/2014/main" id="{CB184277-AFE7-66C9-C473-D638251FA2DC}"/>
               </a:ext>
             </a:extLst>
           </p:cNvPr>
@@ -9494,7 +9679,7 @@
           <a:p>
             <a:r>
               <a:rPr lang="en-US" dirty="0"/>
-              <a:t>Project (Toy car)</a:t>
+              <a:t>Project</a:t>
             </a:r>
           </a:p>
         </p:txBody>
@@ -9504,7 +9689,7 @@
           <p:cNvPr id="3" name="Text Placeholder 2">
             <a:extLst>
               <a:ext uri="{FF2B5EF4-FFF2-40B4-BE49-F238E27FC236}">
-                <a16:creationId xmlns:a16="http://schemas.microsoft.com/office/drawing/2014/main" id="{ADC5C77C-C869-9157-0903-A54C56FABC61}"/>
+                <a16:creationId xmlns:a16="http://schemas.microsoft.com/office/drawing/2014/main" id="{47C04D9A-B5EB-8F4E-E06D-A0054F8B5A75}"/>
               </a:ext>
             </a:extLst>
           </p:cNvPr>
@@ -9522,33 +9707,45 @@
           <a:p>
             <a:r>
               <a:rPr lang="en-US" dirty="0"/>
-              <a:t>Body</a:t>
-            </a:r>
-          </a:p>
-          <a:p>
-            <a:r>
-              <a:rPr lang="en-US" dirty="0"/>
-              <a:t>Wheels</a:t>
-            </a:r>
-          </a:p>
-          <a:p>
-            <a:r>
-              <a:rPr lang="en-US" dirty="0"/>
-              <a:t>Axles</a:t>
-            </a:r>
-          </a:p>
-          <a:p>
-            <a:r>
-              <a:rPr lang="en-US" dirty="0"/>
-              <a:t>Assembly</a:t>
-            </a:r>
-          </a:p>
-        </p:txBody>
-      </p:sp>
+              <a:t>Coffee Mug</a:t>
+            </a:r>
+          </a:p>
+        </p:txBody>
+      </p:sp>
+      <p:pic>
+        <p:nvPicPr>
+          <p:cNvPr id="5" name="Picture 4">
+            <a:extLst>
+              <a:ext uri="{FF2B5EF4-FFF2-40B4-BE49-F238E27FC236}">
+                <a16:creationId xmlns:a16="http://schemas.microsoft.com/office/drawing/2014/main" id="{ECD15D6D-B203-4563-D5C4-1BBFBDA2DAF6}"/>
+              </a:ext>
+            </a:extLst>
+          </p:cNvPr>
+          <p:cNvPicPr>
+            <a:picLocks noChangeAspect="1"/>
+          </p:cNvPicPr>
+          <p:nvPr/>
+        </p:nvPicPr>
+        <p:blipFill>
+          <a:blip r:embed="rId2"/>
+          <a:stretch>
+            <a:fillRect/>
+          </a:stretch>
+        </p:blipFill>
+        <p:spPr>
+          <a:xfrm>
+            <a:off x="7265521" y="2748586"/>
+            <a:ext cx="3343742" cy="2924583"/>
+          </a:xfrm>
+          <a:prstGeom prst="rect">
+            <a:avLst/>
+          </a:prstGeom>
+        </p:spPr>
+      </p:pic>
     </p:spTree>
     <p:extLst>
       <p:ext uri="{BB962C8B-B14F-4D97-AF65-F5344CB8AC3E}">
-        <p14:creationId xmlns:p14="http://schemas.microsoft.com/office/powerpoint/2010/main" val="3938793241"/>
+        <p14:creationId xmlns:p14="http://schemas.microsoft.com/office/powerpoint/2010/main" val="2066858902"/>
       </p:ext>
     </p:extLst>
   </p:cSld>
@@ -9598,7 +9795,7 @@
           <a:p>
             <a:r>
               <a:rPr lang="en-US" dirty="0"/>
-              <a:t>Assignment</a:t>
+              <a:t>Project</a:t>
             </a:r>
           </a:p>
         </p:txBody>
@@ -9626,17 +9823,69 @@
           <a:p>
             <a:r>
               <a:rPr lang="en-US" dirty="0"/>
-              <a:t>Create a 4-part assembly:</a:t>
-            </a:r>
-          </a:p>
-          <a:p>
+              <a:t>Mobile Phone Stand</a:t>
+            </a:r>
+          </a:p>
+          <a:p>
+            <a:pPr lvl="1"/>
             <a:r>
               <a:rPr lang="en-US" dirty="0"/>
-              <a:t>Windmill, robot, gear toy, vehicle</a:t>
-            </a:r>
-          </a:p>
-        </p:txBody>
-      </p:sp>
+              <a:t>Create a 2-part assembly</a:t>
+            </a:r>
+          </a:p>
+          <a:p>
+            <a:pPr lvl="1"/>
+            <a:r>
+              <a:rPr lang="en-US" dirty="0"/>
+              <a:t>A virtual mobile model</a:t>
+            </a:r>
+          </a:p>
+          <a:p>
+            <a:pPr lvl="1"/>
+            <a:r>
+              <a:rPr lang="en-US" dirty="0"/>
+              <a:t>Phone Stand</a:t>
+            </a:r>
+          </a:p>
+          <a:p>
+            <a:pPr lvl="1"/>
+            <a:r>
+              <a:rPr lang="en-US" dirty="0"/>
+              <a:t>Use Align tool and navigation tool to verify</a:t>
+            </a:r>
+          </a:p>
+        </p:txBody>
+      </p:sp>
+      <p:pic>
+        <p:nvPicPr>
+          <p:cNvPr id="5" name="Picture 4">
+            <a:extLst>
+              <a:ext uri="{FF2B5EF4-FFF2-40B4-BE49-F238E27FC236}">
+                <a16:creationId xmlns:a16="http://schemas.microsoft.com/office/drawing/2014/main" id="{0BEBDB58-FC44-2649-89BB-EE0C027D04C8}"/>
+              </a:ext>
+            </a:extLst>
+          </p:cNvPr>
+          <p:cNvPicPr>
+            <a:picLocks noChangeAspect="1"/>
+          </p:cNvPicPr>
+          <p:nvPr/>
+        </p:nvPicPr>
+        <p:blipFill>
+          <a:blip r:embed="rId2"/>
+          <a:stretch>
+            <a:fillRect/>
+          </a:stretch>
+        </p:blipFill>
+        <p:spPr>
+          <a:xfrm>
+            <a:off x="8194903" y="1695977"/>
+            <a:ext cx="3467584" cy="4220164"/>
+          </a:xfrm>
+          <a:prstGeom prst="rect">
+            <a:avLst/>
+          </a:prstGeom>
+        </p:spPr>
+      </p:pic>
     </p:spTree>
     <p:extLst>
       <p:ext uri="{BB962C8B-B14F-4D97-AF65-F5344CB8AC3E}">
@@ -10007,7 +10256,7 @@
         <a:effectLst/>
         <a:extLst>
           <a:ext uri="{AF507438-7753-43e0-B8FC-AC1667EBCBE1}">
-            <a14:hiddenEffects xmlns:a14="http://schemas.microsoft.com/office/drawing/2010/main" xmlns="">
+            <a14:hiddenEffects xmlns="" xmlns:a14="http://schemas.microsoft.com/office/drawing/2010/main">
               <a:effectLst>
                 <a:outerShdw blurRad="40000" dist="20000" dir="5400000" rotWithShape="0">
                   <a:srgbClr val="000000">
@@ -10845,15 +11094,6 @@
 </file>
 
 <file path=customXml/item1.xml><?xml version="1.0" encoding="utf-8"?>
-<?mso-contentType ?>
-<FormTemplates xmlns="http://schemas.microsoft.com/sharepoint/v3/contenttype/forms">
-  <Display>DocumentLibraryForm</Display>
-  <Edit>DocumentLibraryForm</Edit>
-  <New>DocumentLibraryForm</New>
-</FormTemplates>
-</file>
-
-<file path=customXml/item2.xml><?xml version="1.0" encoding="utf-8"?>
 <ct:contentTypeSchema xmlns:ct="http://schemas.microsoft.com/office/2006/metadata/contentType" xmlns:ma="http://schemas.microsoft.com/office/2006/metadata/properties/metaAttributes" ct:_="" ma:_="" ma:contentTypeName="Dokument" ma:contentTypeID="0x0101006C8D9CDDC72AD541B4C07FC0070ADE77" ma:contentTypeVersion="20" ma:contentTypeDescription="Ein neues Dokument erstellen." ma:contentTypeScope="" ma:versionID="7709a8cf9e17d6a947b9b9c570adde9f">
   <xsd:schema xmlns:xsd="http://www.w3.org/2001/XMLSchema" xmlns:xs="http://www.w3.org/2001/XMLSchema" xmlns:p="http://schemas.microsoft.com/office/2006/metadata/properties" xmlns:ns2="066993b7-1e88-4ec3-ab8d-619e678a1c4e" xmlns:ns3="506c2b08-a0f9-4917-8efa-9f374b8a35b1" targetNamespace="http://schemas.microsoft.com/office/2006/metadata/properties" ma:root="true" ma:fieldsID="fd13155ad8c359803de3ce2520e502ed" ns2:_="" ns3:_="">
     <xsd:import namespace="066993b7-1e88-4ec3-ab8d-619e678a1c4e"/>
@@ -11104,6 +11344,15 @@
 </ct:contentTypeSchema>
 </file>
 
+<file path=customXml/item2.xml><?xml version="1.0" encoding="utf-8"?>
+<?mso-contentType ?>
+<FormTemplates xmlns="http://schemas.microsoft.com/sharepoint/v3/contenttype/forms">
+  <Display>DocumentLibraryForm</Display>
+  <Edit>DocumentLibraryForm</Edit>
+  <New>DocumentLibraryForm</New>
+</FormTemplates>
+</file>
+
 <file path=customXml/item3.xml><?xml version="1.0" encoding="utf-8"?>
 <p:properties xmlns:p="http://schemas.microsoft.com/office/2006/metadata/properties" xmlns:xsi="http://www.w3.org/2001/XMLSchema-instance" xmlns:pc="http://schemas.microsoft.com/office/infopath/2007/PartnerControls">
   <documentManagement>
@@ -11132,14 +11381,6 @@
 </file>
 
 <file path=customXml/itemProps1.xml><?xml version="1.0" encoding="utf-8"?>
-<ds:datastoreItem xmlns:ds="http://schemas.openxmlformats.org/officeDocument/2006/customXml" ds:itemID="{62E3DD74-1EFA-48E8-9D1B-9CF44FA9A8A5}">
-  <ds:schemaRefs>
-    <ds:schemaRef ds:uri="http://schemas.microsoft.com/sharepoint/v3/contenttype/forms"/>
-  </ds:schemaRefs>
-</ds:datastoreItem>
-</file>
-
-<file path=customXml/itemProps2.xml><?xml version="1.0" encoding="utf-8"?>
 <ds:datastoreItem xmlns:ds="http://schemas.openxmlformats.org/officeDocument/2006/customXml" ds:itemID="{F571D834-4B00-49F7-9E5C-D08B88A4D7F9}">
   <ds:schemaRefs>
     <ds:schemaRef ds:uri="066993b7-1e88-4ec3-ab8d-619e678a1c4e"/>
@@ -11154,6 +11395,14 @@
     <ds:schemaRef ds:uri="http://schemas.microsoft.com/office/infopath/2007/PartnerControls"/>
     <ds:schemaRef ds:uri="http://schemas.openxmlformats.org/package/2006/metadata/core-properties"/>
     <ds:schemaRef ds:uri="http://www.w3.org/2001/XMLSchema"/>
+  </ds:schemaRefs>
+</ds:datastoreItem>
+</file>
+
+<file path=customXml/itemProps2.xml><?xml version="1.0" encoding="utf-8"?>
+<ds:datastoreItem xmlns:ds="http://schemas.openxmlformats.org/officeDocument/2006/customXml" ds:itemID="{62E3DD74-1EFA-48E8-9D1B-9CF44FA9A8A5}">
+  <ds:schemaRefs>
+    <ds:schemaRef ds:uri="http://schemas.microsoft.com/sharepoint/v3/contenttype/forms"/>
   </ds:schemaRefs>
 </ds:datastoreItem>
 </file>

--- a/Lectures/Week3.pptx
+++ b/Lectures/Week3.pptx
@@ -8680,6 +8680,36 @@
           </a:p>
         </p:txBody>
       </p:sp>
+      <p:pic>
+        <p:nvPicPr>
+          <p:cNvPr id="5" name="Picture 4">
+            <a:extLst>
+              <a:ext uri="{FF2B5EF4-FFF2-40B4-BE49-F238E27FC236}">
+                <a16:creationId xmlns:a16="http://schemas.microsoft.com/office/drawing/2014/main" id="{C1CB2083-DF3B-261F-2487-B3650164237F}"/>
+              </a:ext>
+            </a:extLst>
+          </p:cNvPr>
+          <p:cNvPicPr>
+            <a:picLocks noChangeAspect="1"/>
+          </p:cNvPicPr>
+          <p:nvPr/>
+        </p:nvPicPr>
+        <p:blipFill>
+          <a:blip r:embed="rId2"/>
+          <a:stretch>
+            <a:fillRect/>
+          </a:stretch>
+        </p:blipFill>
+        <p:spPr>
+          <a:xfrm>
+            <a:off x="6877580" y="1881188"/>
+            <a:ext cx="4267796" cy="4067743"/>
+          </a:xfrm>
+          <a:prstGeom prst="rect">
+            <a:avLst/>
+          </a:prstGeom>
+        </p:spPr>
+      </p:pic>
     </p:spTree>
     <p:extLst>
       <p:ext uri="{BB962C8B-B14F-4D97-AF65-F5344CB8AC3E}">
@@ -8833,6 +8863,29 @@
               </a:rPr>
               <a:t>51vkvCLy+nL._AC_SX522_.jpg (522×781)</a:t>
             </a:r>
+            <a:endParaRPr lang="en-US" sz="1600" dirty="0"/>
+          </a:p>
+          <a:p>
+            <a:pPr marL="444500" lvl="1" indent="-266700" defTabSz="914400" eaLnBrk="0" fontAlgn="base" hangingPunct="0">
+              <a:lnSpc>
+                <a:spcPct val="120000"/>
+              </a:lnSpc>
+              <a:spcBef>
+                <a:spcPts val="300"/>
+              </a:spcBef>
+              <a:spcAft>
+                <a:spcPts val="600"/>
+              </a:spcAft>
+              <a:buFont typeface="Calibri" pitchFamily="34" charset="0"/>
+              <a:buChar char="•"/>
+              <a:defRPr/>
+            </a:pPr>
+            <a:r>
+              <a:rPr lang="en-US" sz="1600" dirty="0">
+                <a:hlinkClick r:id="rId6"/>
+              </a:rPr>
+              <a:t>Online SVG image converter</a:t>
+            </a:r>
             <a:endParaRPr lang="en-US" sz="1600" dirty="0">
               <a:solidFill>
                 <a:srgbClr val="53585D"/>
@@ -9037,12 +9090,6 @@
             <a:r>
               <a:rPr lang="en-US" sz="1600" dirty="0"/>
               <a:t>2D drawing to Assembly</a:t>
-            </a:r>
-          </a:p>
-          <a:p>
-            <a:r>
-              <a:rPr lang="en-US" sz="1600" dirty="0"/>
-              <a:t>Complex Geometry</a:t>
             </a:r>
           </a:p>
           <a:p>
